--- a/presentation/Which Startups Raise Again.pptx
+++ b/presentation/Which Startups Raise Again.pptx
@@ -21,7 +21,7 @@
     <p:sldId id="266" r:id="rId12"/>
   </p:sldIdLst>
   <p:sldSz cx="9144000" cy="5143500" type="screen16x9"/>
-  <p:notesSz cx="5143500" cy="9144000"/>
+  <p:notesSz cx="7315200" cy="9601200"/>
   <p:defaultTextStyle>
     <a:lvl1pPr marL="0" algn="l" defTabSz="914400" rtl="0" eaLnBrk="1" latinLnBrk="0" hangingPunct="1">
       <a:defRPr sz="1800" kern="1200">
@@ -288,7 +288,7 @@
         </p:nvSpPr>
         <p:spPr/>
         <p:txBody>
-          <a:bodyPr/>
+          <a:bodyPr lIns="108265" tIns="54132" rIns="108265" bIns="54132"/>
           <a:lstStyle/>
           <a:p>
             <a:endParaRPr lang="en-US" dirty="0"/>
@@ -307,7 +307,7 @@
         </p:nvSpPr>
         <p:spPr/>
         <p:txBody>
-          <a:bodyPr/>
+          <a:bodyPr lIns="108265" tIns="54132" rIns="108265" bIns="54132"/>
           <a:lstStyle/>
           <a:p>
             <a:fld id="{F7021451-1387-4CA6-816F-3879F97B5CBC}" type="slidenum">
@@ -372,7 +372,7 @@
         </p:nvSpPr>
         <p:spPr/>
         <p:txBody>
-          <a:bodyPr/>
+          <a:bodyPr lIns="108265" tIns="54132" rIns="108265" bIns="54132"/>
           <a:lstStyle/>
           <a:p>
             <a:endParaRPr lang="en-US" dirty="0"/>
@@ -391,7 +391,7 @@
         </p:nvSpPr>
         <p:spPr/>
         <p:txBody>
-          <a:bodyPr/>
+          <a:bodyPr lIns="108265" tIns="54132" rIns="108265" bIns="54132"/>
           <a:lstStyle/>
           <a:p>
             <a:fld id="{F7021451-1387-4CA6-816F-3879F97B5CBC}" type="slidenum">
@@ -456,7 +456,7 @@
         </p:nvSpPr>
         <p:spPr/>
         <p:txBody>
-          <a:bodyPr/>
+          <a:bodyPr lIns="108265" tIns="54132" rIns="108265" bIns="54132"/>
           <a:lstStyle/>
           <a:p>
             <a:endParaRPr lang="en-US" dirty="0"/>
@@ -475,7 +475,7 @@
         </p:nvSpPr>
         <p:spPr/>
         <p:txBody>
-          <a:bodyPr/>
+          <a:bodyPr lIns="108265" tIns="54132" rIns="108265" bIns="54132"/>
           <a:lstStyle/>
           <a:p>
             <a:fld id="{F7021451-1387-4CA6-816F-3879F97B5CBC}" type="slidenum">
@@ -540,7 +540,7 @@
         </p:nvSpPr>
         <p:spPr/>
         <p:txBody>
-          <a:bodyPr/>
+          <a:bodyPr lIns="108265" tIns="54132" rIns="108265" bIns="54132"/>
           <a:lstStyle/>
           <a:p>
             <a:endParaRPr lang="en-US" dirty="0"/>
@@ -559,7 +559,7 @@
         </p:nvSpPr>
         <p:spPr/>
         <p:txBody>
-          <a:bodyPr/>
+          <a:bodyPr lIns="108265" tIns="54132" rIns="108265" bIns="54132"/>
           <a:lstStyle/>
           <a:p>
             <a:fld id="{F7021451-1387-4CA6-816F-3879F97B5CBC}" type="slidenum">
@@ -624,7 +624,7 @@
         </p:nvSpPr>
         <p:spPr/>
         <p:txBody>
-          <a:bodyPr/>
+          <a:bodyPr lIns="108265" tIns="54132" rIns="108265" bIns="54132"/>
           <a:lstStyle/>
           <a:p>
             <a:endParaRPr lang="en-US" dirty="0"/>
@@ -643,7 +643,7 @@
         </p:nvSpPr>
         <p:spPr/>
         <p:txBody>
-          <a:bodyPr/>
+          <a:bodyPr lIns="108265" tIns="54132" rIns="108265" bIns="54132"/>
           <a:lstStyle/>
           <a:p>
             <a:fld id="{F7021451-1387-4CA6-816F-3879F97B5CBC}" type="slidenum">
@@ -708,7 +708,7 @@
         </p:nvSpPr>
         <p:spPr/>
         <p:txBody>
-          <a:bodyPr/>
+          <a:bodyPr lIns="108265" tIns="54132" rIns="108265" bIns="54132"/>
           <a:lstStyle/>
           <a:p>
             <a:endParaRPr lang="en-US" dirty="0"/>
@@ -727,7 +727,7 @@
         </p:nvSpPr>
         <p:spPr/>
         <p:txBody>
-          <a:bodyPr/>
+          <a:bodyPr lIns="108265" tIns="54132" rIns="108265" bIns="54132"/>
           <a:lstStyle/>
           <a:p>
             <a:fld id="{F7021451-1387-4CA6-816F-3879F97B5CBC}" type="slidenum">
@@ -792,7 +792,7 @@
         </p:nvSpPr>
         <p:spPr/>
         <p:txBody>
-          <a:bodyPr/>
+          <a:bodyPr lIns="108265" tIns="54132" rIns="108265" bIns="54132"/>
           <a:lstStyle/>
           <a:p>
             <a:endParaRPr lang="en-US" dirty="0"/>
@@ -811,7 +811,7 @@
         </p:nvSpPr>
         <p:spPr/>
         <p:txBody>
-          <a:bodyPr/>
+          <a:bodyPr lIns="108265" tIns="54132" rIns="108265" bIns="54132"/>
           <a:lstStyle/>
           <a:p>
             <a:fld id="{F7021451-1387-4CA6-816F-3879F97B5CBC}" type="slidenum">
@@ -876,7 +876,7 @@
         </p:nvSpPr>
         <p:spPr/>
         <p:txBody>
-          <a:bodyPr/>
+          <a:bodyPr lIns="108265" tIns="54132" rIns="108265" bIns="54132"/>
           <a:lstStyle/>
           <a:p>
             <a:endParaRPr lang="en-US" dirty="0"/>
@@ -895,7 +895,7 @@
         </p:nvSpPr>
         <p:spPr/>
         <p:txBody>
-          <a:bodyPr/>
+          <a:bodyPr lIns="108265" tIns="54132" rIns="108265" bIns="54132"/>
           <a:lstStyle/>
           <a:p>
             <a:fld id="{F7021451-1387-4CA6-816F-3879F97B5CBC}" type="slidenum">
@@ -960,7 +960,7 @@
         </p:nvSpPr>
         <p:spPr/>
         <p:txBody>
-          <a:bodyPr/>
+          <a:bodyPr lIns="108265" tIns="54132" rIns="108265" bIns="54132"/>
           <a:lstStyle/>
           <a:p>
             <a:endParaRPr lang="en-US" dirty="0"/>
@@ -979,7 +979,7 @@
         </p:nvSpPr>
         <p:spPr/>
         <p:txBody>
-          <a:bodyPr/>
+          <a:bodyPr lIns="108265" tIns="54132" rIns="108265" bIns="54132"/>
           <a:lstStyle/>
           <a:p>
             <a:fld id="{F7021451-1387-4CA6-816F-3879F97B5CBC}" type="slidenum">
@@ -1044,7 +1044,7 @@
         </p:nvSpPr>
         <p:spPr/>
         <p:txBody>
-          <a:bodyPr/>
+          <a:bodyPr lIns="108265" tIns="54132" rIns="108265" bIns="54132"/>
           <a:lstStyle/>
           <a:p>
             <a:endParaRPr lang="en-US" dirty="0"/>
@@ -1063,7 +1063,7 @@
         </p:nvSpPr>
         <p:spPr/>
         <p:txBody>
-          <a:bodyPr/>
+          <a:bodyPr lIns="108265" tIns="54132" rIns="108265" bIns="54132"/>
           <a:lstStyle/>
           <a:p>
             <a:fld id="{F7021451-1387-4CA6-816F-3879F97B5CBC}" type="slidenum">
@@ -1128,7 +1128,7 @@
         </p:nvSpPr>
         <p:spPr/>
         <p:txBody>
-          <a:bodyPr/>
+          <a:bodyPr lIns="108265" tIns="54132" rIns="108265" bIns="54132"/>
           <a:lstStyle/>
           <a:p>
             <a:endParaRPr lang="en-US" dirty="0"/>
@@ -1147,7 +1147,7 @@
         </p:nvSpPr>
         <p:spPr/>
         <p:txBody>
-          <a:bodyPr/>
+          <a:bodyPr lIns="108265" tIns="54132" rIns="108265" bIns="54132"/>
           <a:lstStyle/>
           <a:p>
             <a:fld id="{F7021451-1387-4CA6-816F-3879F97B5CBC}" type="slidenum">
@@ -5032,47 +5032,6 @@
       </p:sp>
       <p:sp>
         <p:nvSpPr>
-          <p:cNvPr id="7" name="Text 4"/>
-          <p:cNvSpPr/>
-          <p:nvPr/>
-        </p:nvSpPr>
-        <p:spPr>
-          <a:xfrm>
-            <a:off x="2728996" y="3306417"/>
-            <a:ext cx="3686008" cy="344686"/>
-          </a:xfrm>
-          <a:prstGeom prst="rect">
-            <a:avLst/>
-          </a:prstGeom>
-          <a:noFill/>
-          <a:ln/>
-        </p:spPr>
-        <p:txBody>
-          <a:bodyPr wrap="square" lIns="0" tIns="0" rIns="0" bIns="0" rtlCol="0" anchor="t">
-            <a:spAutoFit/>
-          </a:bodyPr>
-          <a:lstStyle/>
-          <a:p>
-            <a:pPr marL="0" indent="0" algn="ctr">
-              <a:buNone/>
-            </a:pPr>
-            <a:r>
-              <a:rPr lang="en-US" sz="2250" b="1" dirty="0">
-                <a:solidFill>
-                  <a:srgbClr val="475569"/>
-                </a:solidFill>
-                <a:latin typeface="Inter" pitchFamily="34" charset="0"/>
-                <a:ea typeface="Inter" pitchFamily="34" charset="-122"/>
-                <a:cs typeface="Inter" pitchFamily="34" charset="-120"/>
-              </a:rPr>
-              <a:t>of seed startups raise again</a:t>
-            </a:r>
-            <a:endParaRPr lang="en-US" sz="2250" b="1" dirty="0"/>
-          </a:p>
-        </p:txBody>
-      </p:sp>
-      <p:sp>
-        <p:nvSpPr>
           <p:cNvPr id="8" name="Text 5"/>
           <p:cNvSpPr/>
           <p:nvPr/>
@@ -5109,6 +5068,53 @@
               <a:t>Nearly 6 in 10 stall</a:t>
             </a:r>
             <a:endParaRPr lang="en-US" sz="1500" b="1" dirty="0"/>
+          </a:p>
+        </p:txBody>
+      </p:sp>
+      <p:sp>
+        <p:nvSpPr>
+          <p:cNvPr id="10" name="Text 4">
+            <a:extLst>
+              <a:ext uri="{FF2B5EF4-FFF2-40B4-BE49-F238E27FC236}">
+                <a16:creationId xmlns:a16="http://schemas.microsoft.com/office/drawing/2014/main" id="{8190BDD0-B99E-70A1-E64A-3FA21FD01511}"/>
+              </a:ext>
+            </a:extLst>
+          </p:cNvPr>
+          <p:cNvSpPr/>
+          <p:nvPr/>
+        </p:nvSpPr>
+        <p:spPr>
+          <a:xfrm>
+            <a:off x="2728996" y="3220692"/>
+            <a:ext cx="3686008" cy="344686"/>
+          </a:xfrm>
+          <a:prstGeom prst="rect">
+            <a:avLst/>
+          </a:prstGeom>
+          <a:noFill/>
+          <a:ln/>
+        </p:spPr>
+        <p:txBody>
+          <a:bodyPr wrap="square" lIns="0" tIns="0" rIns="0" bIns="0" rtlCol="0" anchor="t">
+            <a:spAutoFit/>
+          </a:bodyPr>
+          <a:lstStyle/>
+          <a:p>
+            <a:pPr marL="0" indent="0" algn="ctr">
+              <a:buNone/>
+            </a:pPr>
+            <a:r>
+              <a:rPr lang="en-US" sz="2250" b="1" dirty="0">
+                <a:solidFill>
+                  <a:srgbClr val="475569"/>
+                </a:solidFill>
+                <a:latin typeface="Inter" pitchFamily="34" charset="0"/>
+                <a:ea typeface="Inter" pitchFamily="34" charset="-122"/>
+                <a:cs typeface="Inter" pitchFamily="34" charset="-120"/>
+              </a:rPr>
+              <a:t>Of seed startups raise again</a:t>
+            </a:r>
+            <a:endParaRPr lang="en-US" sz="2250" b="1" dirty="0"/>
           </a:p>
         </p:txBody>
       </p:sp>

--- a/presentation/Which Startups Raise Again.pptx
+++ b/presentation/Which Startups Raise Again.pptx
@@ -1524,50 +1524,6 @@
           </a:prstGeom>
         </p:spPr>
       </p:pic>
-      <p:sp>
-        <p:nvSpPr>
-          <p:cNvPr id="4" name="Text 1"/>
-          <p:cNvSpPr/>
-          <p:nvPr/>
-        </p:nvSpPr>
-        <p:spPr>
-          <a:xfrm>
-            <a:off x="476249" y="2555302"/>
-            <a:ext cx="4829175" cy="827278"/>
-          </a:xfrm>
-          <a:prstGeom prst="rect">
-            <a:avLst/>
-          </a:prstGeom>
-          <a:noFill/>
-          <a:ln/>
-        </p:spPr>
-        <p:txBody>
-          <a:bodyPr wrap="square" lIns="0" tIns="0" rIns="0" bIns="0" rtlCol="0" anchor="t">
-            <a:spAutoFit/>
-          </a:bodyPr>
-          <a:lstStyle/>
-          <a:p>
-            <a:pPr marL="0" indent="0" algn="l">
-              <a:lnSpc>
-                <a:spcPct val="96000"/>
-              </a:lnSpc>
-              <a:buNone/>
-            </a:pPr>
-            <a:r>
-              <a:rPr lang="en-US" sz="2800" dirty="0">
-                <a:solidFill>
-                  <a:srgbClr val="475569"/>
-                </a:solidFill>
-                <a:latin typeface="Inter" pitchFamily="34" charset="0"/>
-                <a:ea typeface="Inter" pitchFamily="34" charset="-122"/>
-                <a:cs typeface="Inter" pitchFamily="34" charset="-120"/>
-              </a:rPr>
-              <a:t>Picking seed-stage startups that go on to secure more funding</a:t>
-            </a:r>
-            <a:endParaRPr lang="en-US" sz="2800" dirty="0"/>
-          </a:p>
-        </p:txBody>
-      </p:sp>
       <p:pic>
         <p:nvPicPr>
           <p:cNvPr id="5" name="Image 1" descr="preencoded.png"/>
@@ -1578,14 +1534,12 @@
         </p:nvPicPr>
         <p:blipFill>
           <a:blip r:embed="rId4"/>
-          <a:stretch>
-            <a:fillRect/>
-          </a:stretch>
+          <a:stretch/>
         </p:blipFill>
         <p:spPr>
           <a:xfrm>
-            <a:off x="5158569" y="574801"/>
-            <a:ext cx="3871131" cy="2396604"/>
+            <a:off x="5158569" y="574896"/>
+            <a:ext cx="3871131" cy="2396414"/>
           </a:xfrm>
           <a:prstGeom prst="rect">
             <a:avLst/>
@@ -1729,6 +1683,56 @@
               <a:t>WHICH STARTUPS RAISE AGAIN?</a:t>
             </a:r>
             <a:endParaRPr lang="en-US" sz="4350" dirty="0"/>
+          </a:p>
+        </p:txBody>
+      </p:sp>
+      <p:sp>
+        <p:nvSpPr>
+          <p:cNvPr id="8" name="Text 1">
+            <a:extLst>
+              <a:ext uri="{FF2B5EF4-FFF2-40B4-BE49-F238E27FC236}">
+                <a16:creationId xmlns:a16="http://schemas.microsoft.com/office/drawing/2014/main" id="{7E1F2D13-442E-279F-0C55-8356195CE8DA}"/>
+              </a:ext>
+            </a:extLst>
+          </p:cNvPr>
+          <p:cNvSpPr/>
+          <p:nvPr/>
+        </p:nvSpPr>
+        <p:spPr>
+          <a:xfrm>
+            <a:off x="390525" y="2633760"/>
+            <a:ext cx="5216042" cy="827278"/>
+          </a:xfrm>
+          <a:prstGeom prst="rect">
+            <a:avLst/>
+          </a:prstGeom>
+          <a:noFill/>
+          <a:ln/>
+        </p:spPr>
+        <p:txBody>
+          <a:bodyPr wrap="square" lIns="0" tIns="0" rIns="0" bIns="0" rtlCol="0" anchor="t">
+            <a:spAutoFit/>
+          </a:bodyPr>
+          <a:lstStyle/>
+          <a:p>
+            <a:pPr marL="0" indent="0" algn="l">
+              <a:lnSpc>
+                <a:spcPct val="96000"/>
+              </a:lnSpc>
+              <a:buNone/>
+            </a:pPr>
+            <a:r>
+              <a:rPr lang="en-US" sz="2800" dirty="0">
+                <a:solidFill>
+                  <a:srgbClr val="475569"/>
+                </a:solidFill>
+                <a:latin typeface="Inter" pitchFamily="34" charset="0"/>
+                <a:ea typeface="Inter" pitchFamily="34" charset="-122"/>
+                <a:cs typeface="Inter" pitchFamily="34" charset="-120"/>
+              </a:rPr>
+              <a:t>Picking seed-stage startups that go on to secure more funding</a:t>
+            </a:r>
+            <a:endParaRPr lang="en-US" sz="2800" dirty="0"/>
           </a:p>
         </p:txBody>
       </p:sp>
@@ -1886,8 +1890,8 @@
         </p:nvSpPr>
         <p:spPr>
           <a:xfrm>
-            <a:off x="800100" y="4152774"/>
-            <a:ext cx="7829550" cy="265907"/>
+            <a:off x="742950" y="4019822"/>
+            <a:ext cx="7710708" cy="531812"/>
           </a:xfrm>
           <a:prstGeom prst="rect">
             <a:avLst/>
@@ -2502,7 +2506,7 @@
         <p:spPr>
           <a:xfrm>
             <a:off x="571500" y="3214129"/>
-            <a:ext cx="3957638" cy="203902"/>
+            <a:ext cx="4129086" cy="203902"/>
           </a:xfrm>
           <a:prstGeom prst="rect">
             <a:avLst/>
@@ -2666,8 +2670,8 @@
         </p:nvSpPr>
         <p:spPr>
           <a:xfrm>
-            <a:off x="4757738" y="3214129"/>
-            <a:ext cx="3957638" cy="419346"/>
+            <a:off x="4757737" y="3214129"/>
+            <a:ext cx="4253039" cy="203902"/>
           </a:xfrm>
           <a:prstGeom prst="rect">
             <a:avLst/>
@@ -2915,50 +2919,6 @@
       </p:pic>
       <p:sp>
         <p:nvSpPr>
-          <p:cNvPr id="7" name="Text 3"/>
-          <p:cNvSpPr/>
-          <p:nvPr/>
-        </p:nvSpPr>
-        <p:spPr>
-          <a:xfrm>
-            <a:off x="685800" y="2543008"/>
-            <a:ext cx="2457450" cy="535531"/>
-          </a:xfrm>
-          <a:prstGeom prst="rect">
-            <a:avLst/>
-          </a:prstGeom>
-          <a:noFill/>
-          <a:ln/>
-        </p:spPr>
-        <p:txBody>
-          <a:bodyPr wrap="square" lIns="0" tIns="0" rIns="0" bIns="0" rtlCol="0" anchor="t">
-            <a:spAutoFit/>
-          </a:bodyPr>
-          <a:lstStyle/>
-          <a:p>
-            <a:pPr marL="0" indent="0" algn="l">
-              <a:lnSpc>
-                <a:spcPct val="120000"/>
-              </a:lnSpc>
-              <a:buNone/>
-            </a:pPr>
-            <a:r>
-              <a:rPr lang="en-US" sz="1500" b="1" dirty="0">
-                <a:solidFill>
-                  <a:srgbClr val="334155"/>
-                </a:solidFill>
-                <a:latin typeface="Inter" pitchFamily="34" charset="0"/>
-                <a:ea typeface="Inter" pitchFamily="34" charset="-122"/>
-                <a:cs typeface="Inter" pitchFamily="34" charset="-120"/>
-              </a:rPr>
-              <a:t>VC firms invest small "seed" cheques in very young startups</a:t>
-            </a:r>
-            <a:endParaRPr lang="en-US" sz="1500" b="1" dirty="0"/>
-          </a:p>
-        </p:txBody>
-      </p:sp>
-      <p:sp>
-        <p:nvSpPr>
           <p:cNvPr id="8" name="Shape 4"/>
           <p:cNvSpPr/>
           <p:nvPr/>
@@ -3045,8 +3005,8 @@
         </p:nvSpPr>
         <p:spPr>
           <a:xfrm>
-            <a:off x="3400425" y="2543008"/>
-            <a:ext cx="2457450" cy="535531"/>
+            <a:off x="3400424" y="2543008"/>
+            <a:ext cx="2400303" cy="811504"/>
           </a:xfrm>
           <a:prstGeom prst="rect">
             <a:avLst/>
@@ -3169,8 +3129,8 @@
         </p:nvSpPr>
         <p:spPr>
           <a:xfrm>
-            <a:off x="6115050" y="2543008"/>
-            <a:ext cx="2457450" cy="535531"/>
+            <a:off x="6115049" y="2543008"/>
+            <a:ext cx="2405221" cy="811504"/>
           </a:xfrm>
           <a:prstGeom prst="rect">
             <a:avLst/>
@@ -3200,6 +3160,56 @@
                 <a:cs typeface="Inter" pitchFamily="34" charset="-120"/>
               </a:rPr>
               <a:t>A startup that raises seed and never raises again has "stalled"</a:t>
+            </a:r>
+            <a:endParaRPr lang="en-US" sz="1500" b="1" dirty="0"/>
+          </a:p>
+        </p:txBody>
+      </p:sp>
+      <p:sp>
+        <p:nvSpPr>
+          <p:cNvPr id="17" name="Text 3">
+            <a:extLst>
+              <a:ext uri="{FF2B5EF4-FFF2-40B4-BE49-F238E27FC236}">
+                <a16:creationId xmlns:a16="http://schemas.microsoft.com/office/drawing/2014/main" id="{09F79398-BAC1-E6FA-A9DF-B2B4981C891B}"/>
+              </a:ext>
+            </a:extLst>
+          </p:cNvPr>
+          <p:cNvSpPr/>
+          <p:nvPr/>
+        </p:nvSpPr>
+        <p:spPr>
+          <a:xfrm>
+            <a:off x="708699" y="2543007"/>
+            <a:ext cx="2514600" cy="535531"/>
+          </a:xfrm>
+          <a:prstGeom prst="rect">
+            <a:avLst/>
+          </a:prstGeom>
+          <a:noFill/>
+          <a:ln/>
+        </p:spPr>
+        <p:txBody>
+          <a:bodyPr wrap="square" lIns="0" tIns="0" rIns="0" bIns="0" rtlCol="0" anchor="t">
+            <a:spAutoFit/>
+          </a:bodyPr>
+          <a:lstStyle/>
+          <a:p>
+            <a:pPr marL="0" indent="0" algn="l">
+              <a:lnSpc>
+                <a:spcPct val="120000"/>
+              </a:lnSpc>
+              <a:buNone/>
+            </a:pPr>
+            <a:r>
+              <a:rPr lang="en-US" sz="1500" b="1" dirty="0">
+                <a:solidFill>
+                  <a:srgbClr val="334155"/>
+                </a:solidFill>
+                <a:latin typeface="Inter" pitchFamily="34" charset="0"/>
+                <a:ea typeface="Inter" pitchFamily="34" charset="-122"/>
+                <a:cs typeface="Inter" pitchFamily="34" charset="-120"/>
+              </a:rPr>
+              <a:t>VC firms invest small "seed" cheques in very young startups</a:t>
             </a:r>
             <a:endParaRPr lang="en-US" sz="1500" b="1" dirty="0"/>
           </a:p>
@@ -5073,10 +5083,10 @@
       </p:sp>
       <p:sp>
         <p:nvSpPr>
-          <p:cNvPr id="10" name="Text 4">
+          <p:cNvPr id="12" name="Text 5">
             <a:extLst>
               <a:ext uri="{FF2B5EF4-FFF2-40B4-BE49-F238E27FC236}">
-                <a16:creationId xmlns:a16="http://schemas.microsoft.com/office/drawing/2014/main" id="{8190BDD0-B99E-70A1-E64A-3FA21FD01511}"/>
+                <a16:creationId xmlns:a16="http://schemas.microsoft.com/office/drawing/2014/main" id="{8F06F128-0561-FB92-0DAA-62F6F3345FA9}"/>
               </a:ext>
             </a:extLst>
           </p:cNvPr>
@@ -5085,8 +5095,8 @@
         </p:nvSpPr>
         <p:spPr>
           <a:xfrm>
-            <a:off x="2728996" y="3220692"/>
-            <a:ext cx="3686008" cy="344686"/>
+            <a:off x="2542060" y="3073769"/>
+            <a:ext cx="4059880" cy="430887"/>
           </a:xfrm>
           <a:prstGeom prst="rect">
             <a:avLst/>
@@ -5104,17 +5114,17 @@
               <a:buNone/>
             </a:pPr>
             <a:r>
-              <a:rPr lang="en-US" sz="2250" b="1" dirty="0">
+              <a:rPr lang="en-US" sz="2800" b="1" dirty="0">
                 <a:solidFill>
-                  <a:srgbClr val="475569"/>
+                  <a:srgbClr val="64748B"/>
                 </a:solidFill>
                 <a:latin typeface="Inter" pitchFamily="34" charset="0"/>
                 <a:ea typeface="Inter" pitchFamily="34" charset="-122"/>
                 <a:cs typeface="Inter" pitchFamily="34" charset="-120"/>
               </a:rPr>
-              <a:t>Of seed startups raise again</a:t>
+              <a:t>Of startups raise again</a:t>
             </a:r>
-            <a:endParaRPr lang="en-US" sz="2250" b="1" dirty="0"/>
+            <a:endParaRPr lang="en-US" sz="2800" b="1" dirty="0"/>
           </a:p>
         </p:txBody>
       </p:sp>
@@ -5788,7 +5798,7 @@
         <p:spPr>
           <a:xfrm>
             <a:off x="5186363" y="1780295"/>
-            <a:ext cx="3386138" cy="480026"/>
+            <a:ext cx="3430797" cy="419346"/>
           </a:xfrm>
           <a:prstGeom prst="rect">
             <a:avLst/>
@@ -6118,7 +6128,7 @@
         <p:spPr>
           <a:xfrm>
             <a:off x="5186363" y="3514321"/>
-            <a:ext cx="3386138" cy="480027"/>
+            <a:ext cx="3321796" cy="419346"/>
           </a:xfrm>
           <a:prstGeom prst="rect">
             <a:avLst/>
@@ -6406,7 +6416,7 @@
         <p:spPr>
           <a:xfrm>
             <a:off x="714376" y="2868885"/>
-            <a:ext cx="2442632" cy="503215"/>
+            <a:ext cx="2409816" cy="760721"/>
           </a:xfrm>
           <a:prstGeom prst="rect">
             <a:avLst/>
@@ -6574,7 +6584,7 @@
         <p:spPr>
           <a:xfrm>
             <a:off x="3438516" y="2868885"/>
-            <a:ext cx="2071697" cy="503215"/>
+            <a:ext cx="2409816" cy="503215"/>
           </a:xfrm>
           <a:prstGeom prst="rect">
             <a:avLst/>
@@ -6742,7 +6752,7 @@
         <p:spPr>
           <a:xfrm>
             <a:off x="6162656" y="2868885"/>
-            <a:ext cx="2324119" cy="503215"/>
+            <a:ext cx="2409844" cy="503215"/>
           </a:xfrm>
           <a:prstGeom prst="rect">
             <a:avLst/>
